--- a/Платформер.pptx
+++ b/Платформер.pptx
@@ -12,7 +12,8 @@
     <p:sldId id="261" r:id="rId6"/>
     <p:sldId id="260" r:id="rId7"/>
     <p:sldId id="262" r:id="rId8"/>
-    <p:sldId id="263" r:id="rId9"/>
+    <p:sldId id="264" r:id="rId9"/>
+    <p:sldId id="263" r:id="rId10"/>
   </p:sldIdLst>
   <p:sldSz cx="9144000" cy="6858000" type="screen4x3"/>
   <p:notesSz cx="6858000" cy="9144000"/>
@@ -295,7 +296,7 @@
           <a:p>
             <a:fld id="{771EA96F-B606-4F69-9F2C-3E7F3E736C89}" type="datetimeFigureOut">
               <a:rPr lang="ru-RU" smtClean="0"/>
-              <a:t>12.01.2022</a:t>
+              <a:t>27.01.2022</a:t>
             </a:fld>
             <a:endParaRPr lang="ru-RU"/>
           </a:p>
@@ -465,7 +466,7 @@
           <a:p>
             <a:fld id="{771EA96F-B606-4F69-9F2C-3E7F3E736C89}" type="datetimeFigureOut">
               <a:rPr lang="ru-RU" smtClean="0"/>
-              <a:t>12.01.2022</a:t>
+              <a:t>27.01.2022</a:t>
             </a:fld>
             <a:endParaRPr lang="ru-RU"/>
           </a:p>
@@ -645,7 +646,7 @@
           <a:p>
             <a:fld id="{771EA96F-B606-4F69-9F2C-3E7F3E736C89}" type="datetimeFigureOut">
               <a:rPr lang="ru-RU" smtClean="0"/>
-              <a:t>12.01.2022</a:t>
+              <a:t>27.01.2022</a:t>
             </a:fld>
             <a:endParaRPr lang="ru-RU"/>
           </a:p>
@@ -815,7 +816,7 @@
           <a:p>
             <a:fld id="{771EA96F-B606-4F69-9F2C-3E7F3E736C89}" type="datetimeFigureOut">
               <a:rPr lang="ru-RU" smtClean="0"/>
-              <a:t>12.01.2022</a:t>
+              <a:t>27.01.2022</a:t>
             </a:fld>
             <a:endParaRPr lang="ru-RU"/>
           </a:p>
@@ -1061,7 +1062,7 @@
           <a:p>
             <a:fld id="{771EA96F-B606-4F69-9F2C-3E7F3E736C89}" type="datetimeFigureOut">
               <a:rPr lang="ru-RU" smtClean="0"/>
-              <a:t>12.01.2022</a:t>
+              <a:t>27.01.2022</a:t>
             </a:fld>
             <a:endParaRPr lang="ru-RU"/>
           </a:p>
@@ -1349,7 +1350,7 @@
           <a:p>
             <a:fld id="{771EA96F-B606-4F69-9F2C-3E7F3E736C89}" type="datetimeFigureOut">
               <a:rPr lang="ru-RU" smtClean="0"/>
-              <a:t>12.01.2022</a:t>
+              <a:t>27.01.2022</a:t>
             </a:fld>
             <a:endParaRPr lang="ru-RU"/>
           </a:p>
@@ -1771,7 +1772,7 @@
           <a:p>
             <a:fld id="{771EA96F-B606-4F69-9F2C-3E7F3E736C89}" type="datetimeFigureOut">
               <a:rPr lang="ru-RU" smtClean="0"/>
-              <a:t>12.01.2022</a:t>
+              <a:t>27.01.2022</a:t>
             </a:fld>
             <a:endParaRPr lang="ru-RU"/>
           </a:p>
@@ -1889,7 +1890,7 @@
           <a:p>
             <a:fld id="{771EA96F-B606-4F69-9F2C-3E7F3E736C89}" type="datetimeFigureOut">
               <a:rPr lang="ru-RU" smtClean="0"/>
-              <a:t>12.01.2022</a:t>
+              <a:t>27.01.2022</a:t>
             </a:fld>
             <a:endParaRPr lang="ru-RU"/>
           </a:p>
@@ -1984,7 +1985,7 @@
           <a:p>
             <a:fld id="{771EA96F-B606-4F69-9F2C-3E7F3E736C89}" type="datetimeFigureOut">
               <a:rPr lang="ru-RU" smtClean="0"/>
-              <a:t>12.01.2022</a:t>
+              <a:t>27.01.2022</a:t>
             </a:fld>
             <a:endParaRPr lang="ru-RU"/>
           </a:p>
@@ -2261,7 +2262,7 @@
           <a:p>
             <a:fld id="{771EA96F-B606-4F69-9F2C-3E7F3E736C89}" type="datetimeFigureOut">
               <a:rPr lang="ru-RU" smtClean="0"/>
-              <a:t>12.01.2022</a:t>
+              <a:t>27.01.2022</a:t>
             </a:fld>
             <a:endParaRPr lang="ru-RU"/>
           </a:p>
@@ -2514,7 +2515,7 @@
           <a:p>
             <a:fld id="{771EA96F-B606-4F69-9F2C-3E7F3E736C89}" type="datetimeFigureOut">
               <a:rPr lang="ru-RU" smtClean="0"/>
-              <a:t>12.01.2022</a:t>
+              <a:t>27.01.2022</a:t>
             </a:fld>
             <a:endParaRPr lang="ru-RU"/>
           </a:p>
@@ -2727,7 +2728,7 @@
           <a:p>
             <a:fld id="{771EA96F-B606-4F69-9F2C-3E7F3E736C89}" type="datetimeFigureOut">
               <a:rPr lang="ru-RU" smtClean="0"/>
-              <a:t>12.01.2022</a:t>
+              <a:t>27.01.2022</a:t>
             </a:fld>
             <a:endParaRPr lang="ru-RU"/>
           </a:p>
@@ -3574,11 +3575,6 @@
               </a:rPr>
               <a:t>модули для вычисления в среде координат.</a:t>
             </a:r>
-            <a:endParaRPr lang="ru-RU" sz="2900" dirty="0" smtClean="0">
-              <a:latin typeface="Calibri" panose="020F0502020204030204" pitchFamily="34" charset="0"/>
-              <a:ea typeface="Calibri" panose="020F0502020204030204" pitchFamily="34" charset="0"/>
-              <a:cs typeface="Times New Roman" panose="02020603050405020304" pitchFamily="18" charset="0"/>
-            </a:endParaRPr>
           </a:p>
           <a:p>
             <a:pPr marL="0" indent="0">
@@ -3940,7 +3936,7 @@
         </p:nvSpPr>
         <p:spPr>
           <a:xfrm>
-            <a:off x="683568" y="188640"/>
+            <a:off x="536311" y="44624"/>
             <a:ext cx="8229600" cy="1143000"/>
           </a:xfrm>
         </p:spPr>
@@ -3960,13 +3956,11 @@
       </p:sp>
       <p:pic>
         <p:nvPicPr>
-          <p:cNvPr id="3074" name="Picture 2"/>
+          <p:cNvPr id="1026" name="Picture 2"/>
           <p:cNvPicPr>
-            <a:picLocks noGrp="1" noChangeAspect="1" noChangeArrowheads="1"/>
+            <a:picLocks noChangeAspect="1" noChangeArrowheads="1"/>
           </p:cNvPicPr>
-          <p:nvPr>
-            <p:ph idx="1"/>
-          </p:nvPr>
+          <p:nvPr/>
         </p:nvPicPr>
         <p:blipFill rotWithShape="1">
           <a:blip r:embed="rId2">
@@ -3976,13 +3970,13 @@
               </a:ext>
             </a:extLst>
           </a:blip>
-          <a:srcRect l="620"/>
+          <a:srcRect l="849" t="3807"/>
           <a:stretch/>
         </p:blipFill>
         <p:spPr bwMode="auto">
           <a:xfrm>
-            <a:off x="1115616" y="1268760"/>
-            <a:ext cx="6755832" cy="5108509"/>
+            <a:off x="1115616" y="1084548"/>
+            <a:ext cx="7200800" cy="5410277"/>
           </a:xfrm>
           <a:prstGeom prst="rect">
             <a:avLst/>
@@ -4062,9 +4056,16 @@
             <p:ph idx="1"/>
           </p:nvPr>
         </p:nvSpPr>
-        <p:spPr/>
-        <p:txBody>
-          <a:bodyPr/>
+        <p:spPr>
+          <a:xfrm>
+            <a:off x="467544" y="188640"/>
+            <a:ext cx="8229600" cy="532656"/>
+          </a:xfrm>
+        </p:spPr>
+        <p:txBody>
+          <a:bodyPr>
+            <a:normAutofit lnSpcReduction="10000"/>
+          </a:bodyPr>
           <a:lstStyle/>
           <a:p>
             <a:pPr marL="0" indent="0" algn="ctr">
@@ -4072,16 +4073,75 @@
             </a:pPr>
             <a:r>
               <a:rPr lang="ru-RU" dirty="0" smtClean="0"/>
-              <a:t>тут когда игра будет доделана до конца будет </a:t>
-            </a:r>
-            <a:r>
-              <a:rPr lang="ru-RU" dirty="0" err="1" smtClean="0"/>
-              <a:t>гемплей</a:t>
-            </a:r>
-            <a:endParaRPr lang="ru-RU" dirty="0"/>
-          </a:p>
-        </p:txBody>
-      </p:sp>
+              <a:t>Магазин</a:t>
+            </a:r>
+          </a:p>
+        </p:txBody>
+      </p:sp>
+      <p:pic>
+        <p:nvPicPr>
+          <p:cNvPr id="2050" name="Picture 2"/>
+          <p:cNvPicPr>
+            <a:picLocks noChangeAspect="1" noChangeArrowheads="1"/>
+          </p:cNvPicPr>
+          <p:nvPr/>
+        </p:nvPicPr>
+        <p:blipFill>
+          <a:blip r:embed="rId2">
+            <a:extLst>
+              <a:ext uri="{28A0092B-C50C-407E-A947-70E740481C1C}">
+                <a14:useLocalDpi xmlns:a14="http://schemas.microsoft.com/office/drawing/2010/main" val="0"/>
+              </a:ext>
+            </a:extLst>
+          </a:blip>
+          <a:srcRect/>
+          <a:stretch>
+            <a:fillRect/>
+          </a:stretch>
+        </p:blipFill>
+        <p:spPr bwMode="auto">
+          <a:xfrm>
+            <a:off x="755576" y="764703"/>
+            <a:ext cx="7848872" cy="5860099"/>
+          </a:xfrm>
+          <a:prstGeom prst="rect">
+            <a:avLst/>
+          </a:prstGeom>
+          <a:noFill/>
+          <a:ln>
+            <a:noFill/>
+          </a:ln>
+          <a:effectLst/>
+          <a:extLst>
+            <a:ext uri="{909E8E84-426E-40DD-AFC4-6F175D3DCCD1}">
+              <a14:hiddenFill xmlns:a14="http://schemas.microsoft.com/office/drawing/2010/main">
+                <a:solidFill>
+                  <a:schemeClr val="accent1"/>
+                </a:solidFill>
+              </a14:hiddenFill>
+            </a:ext>
+            <a:ext uri="{91240B29-F687-4F45-9708-019B960494DF}">
+              <a14:hiddenLine xmlns:a14="http://schemas.microsoft.com/office/drawing/2010/main" w="9525">
+                <a:solidFill>
+                  <a:schemeClr val="tx1"/>
+                </a:solidFill>
+                <a:miter lim="800000"/>
+                <a:headEnd/>
+                <a:tailEnd/>
+              </a14:hiddenLine>
+            </a:ext>
+            <a:ext uri="{AF507438-7753-43E0-B8FC-AC1667EBCBE1}">
+              <a14:hiddenEffects xmlns:a14="http://schemas.microsoft.com/office/drawing/2010/main">
+                <a:effectLst>
+                  <a:outerShdw dist="35921" dir="2700000" algn="ctr" rotWithShape="0">
+                    <a:schemeClr val="bg2"/>
+                  </a:outerShdw>
+                </a:effectLst>
+              </a14:hiddenEffects>
+            </a:ext>
+          </a:extLst>
+        </p:spPr>
+      </p:pic>
     </p:spTree>
     <p:extLst>
       <p:ext uri="{BB962C8B-B14F-4D97-AF65-F5344CB8AC3E}">
@@ -4122,7 +4182,12 @@
             <p:ph type="title"/>
           </p:nvPr>
         </p:nvSpPr>
-        <p:spPr/>
+        <p:spPr>
+          <a:xfrm>
+            <a:off x="467544" y="116632"/>
+            <a:ext cx="8229600" cy="940966"/>
+          </a:xfrm>
+        </p:spPr>
         <p:txBody>
           <a:bodyPr>
             <a:normAutofit/>
@@ -4130,44 +4195,77 @@
           <a:lstStyle/>
           <a:p>
             <a:r>
-              <a:rPr lang="ru-RU" dirty="0" smtClean="0"/>
-              <a:t>Финальное окно</a:t>
+              <a:rPr lang="ru-RU" dirty="0" err="1" smtClean="0"/>
+              <a:t>Геймплей</a:t>
             </a:r>
             <a:endParaRPr lang="ru-RU" dirty="0"/>
           </a:p>
         </p:txBody>
       </p:sp>
-      <p:sp>
-        <p:nvSpPr>
-          <p:cNvPr id="3" name="Объект 2"/>
-          <p:cNvSpPr>
-            <a:spLocks noGrp="1"/>
-          </p:cNvSpPr>
-          <p:nvPr>
-            <p:ph idx="1"/>
-          </p:nvPr>
-        </p:nvSpPr>
-        <p:spPr>
+      <p:pic>
+        <p:nvPicPr>
+          <p:cNvPr id="5" name="Picture 3"/>
+          <p:cNvPicPr>
+            <a:picLocks noChangeAspect="1" noChangeArrowheads="1"/>
+          </p:cNvPicPr>
+          <p:nvPr/>
+        </p:nvPicPr>
+        <p:blipFill>
+          <a:blip r:embed="rId2">
+            <a:extLst>
+              <a:ext uri="{28A0092B-C50C-407E-A947-70E740481C1C}">
+                <a14:useLocalDpi xmlns:a14="http://schemas.microsoft.com/office/drawing/2010/main" val="0"/>
+              </a:ext>
+            </a:extLst>
+          </a:blip>
+          <a:srcRect/>
+          <a:stretch>
+            <a:fillRect/>
+          </a:stretch>
+        </p:blipFill>
+        <p:spPr bwMode="auto">
           <a:xfrm>
-            <a:off x="611560" y="3284984"/>
-            <a:ext cx="8229600" cy="1440160"/>
+            <a:off x="971600" y="1124744"/>
+            <a:ext cx="7224480" cy="5372713"/>
           </a:xfrm>
+          <a:prstGeom prst="rect">
+            <a:avLst/>
+          </a:prstGeom>
+          <a:noFill/>
+          <a:ln>
+            <a:noFill/>
+          </a:ln>
+          <a:effectLst/>
+          <a:extLst>
+            <a:ext uri="{909E8E84-426E-40DD-AFC4-6F175D3DCCD1}">
+              <a14:hiddenFill xmlns:a14="http://schemas.microsoft.com/office/drawing/2010/main">
+                <a:solidFill>
+                  <a:schemeClr val="accent1"/>
+                </a:solidFill>
+              </a14:hiddenFill>
+            </a:ext>
+            <a:ext uri="{91240B29-F687-4F45-9708-019B960494DF}">
+              <a14:hiddenLine xmlns:a14="http://schemas.microsoft.com/office/drawing/2010/main" w="9525">
+                <a:solidFill>
+                  <a:schemeClr val="tx1"/>
+                </a:solidFill>
+                <a:miter lim="800000"/>
+                <a:headEnd/>
+                <a:tailEnd/>
+              </a14:hiddenLine>
+            </a:ext>
+            <a:ext uri="{AF507438-7753-43E0-B8FC-AC1667EBCBE1}">
+              <a14:hiddenEffects xmlns:a14="http://schemas.microsoft.com/office/drawing/2010/main">
+                <a:effectLst>
+                  <a:outerShdw dist="35921" dir="2700000" algn="ctr" rotWithShape="0">
+                    <a:schemeClr val="bg2"/>
+                  </a:outerShdw>
+                </a:effectLst>
+              </a14:hiddenEffects>
+            </a:ext>
+          </a:extLst>
         </p:spPr>
-        <p:txBody>
-          <a:bodyPr/>
-          <a:lstStyle/>
-          <a:p>
-            <a:pPr marL="0" indent="0" algn="ctr">
-              <a:buNone/>
-            </a:pPr>
-            <a:r>
-              <a:rPr lang="ru-RU" dirty="0" smtClean="0"/>
-              <a:t>Тут будет финальное окно</a:t>
-            </a:r>
-            <a:endParaRPr lang="ru-RU" dirty="0"/>
-          </a:p>
-        </p:txBody>
-      </p:sp>
+      </p:pic>
     </p:spTree>
     <p:extLst>
       <p:ext uri="{BB962C8B-B14F-4D97-AF65-F5344CB8AC3E}">
@@ -4182,6 +4280,128 @@
 </file>
 
 <file path=ppt/slides/slide8.xml><?xml version="1.0" encoding="utf-8"?>
+<p:sld xmlns:a="http://schemas.openxmlformats.org/drawingml/2006/main" xmlns:r="http://schemas.openxmlformats.org/officeDocument/2006/relationships" xmlns:p="http://schemas.openxmlformats.org/presentationml/2006/main">
+  <p:cSld>
+    <p:spTree>
+      <p:nvGrpSpPr>
+        <p:cNvPr id="1" name=""/>
+        <p:cNvGrpSpPr/>
+        <p:nvPr/>
+      </p:nvGrpSpPr>
+      <p:grpSpPr>
+        <a:xfrm>
+          <a:off x="0" y="0"/>
+          <a:ext cx="0" cy="0"/>
+          <a:chOff x="0" y="0"/>
+          <a:chExt cx="0" cy="0"/>
+        </a:xfrm>
+      </p:grpSpPr>
+      <p:sp>
+        <p:nvSpPr>
+          <p:cNvPr id="2" name="Заголовок 1"/>
+          <p:cNvSpPr>
+            <a:spLocks noGrp="1"/>
+          </p:cNvSpPr>
+          <p:nvPr>
+            <p:ph type="title"/>
+          </p:nvPr>
+        </p:nvSpPr>
+        <p:spPr>
+          <a:xfrm>
+            <a:off x="467544" y="-99392"/>
+            <a:ext cx="8229600" cy="868958"/>
+          </a:xfrm>
+        </p:spPr>
+        <p:txBody>
+          <a:bodyPr/>
+          <a:lstStyle/>
+          <a:p>
+            <a:r>
+              <a:rPr lang="ru-RU" dirty="0" smtClean="0"/>
+              <a:t>Окно выигрыша</a:t>
+            </a:r>
+            <a:endParaRPr lang="ru-RU" dirty="0"/>
+          </a:p>
+        </p:txBody>
+      </p:sp>
+      <p:pic>
+        <p:nvPicPr>
+          <p:cNvPr id="3074" name="Picture 2"/>
+          <p:cNvPicPr>
+            <a:picLocks noChangeAspect="1" noChangeArrowheads="1"/>
+          </p:cNvPicPr>
+          <p:nvPr/>
+        </p:nvPicPr>
+        <p:blipFill>
+          <a:blip r:embed="rId2">
+            <a:extLst>
+              <a:ext uri="{28A0092B-C50C-407E-A947-70E740481C1C}">
+                <a14:useLocalDpi xmlns:a14="http://schemas.microsoft.com/office/drawing/2010/main" val="0"/>
+              </a:ext>
+            </a:extLst>
+          </a:blip>
+          <a:srcRect/>
+          <a:stretch>
+            <a:fillRect/>
+          </a:stretch>
+        </p:blipFill>
+        <p:spPr bwMode="auto">
+          <a:xfrm>
+            <a:off x="899592" y="836712"/>
+            <a:ext cx="7485254" cy="5651078"/>
+          </a:xfrm>
+          <a:prstGeom prst="rect">
+            <a:avLst/>
+          </a:prstGeom>
+          <a:noFill/>
+          <a:ln>
+            <a:noFill/>
+          </a:ln>
+          <a:effectLst/>
+          <a:extLst>
+            <a:ext uri="{909E8E84-426E-40DD-AFC4-6F175D3DCCD1}">
+              <a14:hiddenFill xmlns:a14="http://schemas.microsoft.com/office/drawing/2010/main">
+                <a:solidFill>
+                  <a:schemeClr val="accent1"/>
+                </a:solidFill>
+              </a14:hiddenFill>
+            </a:ext>
+            <a:ext uri="{91240B29-F687-4F45-9708-019B960494DF}">
+              <a14:hiddenLine xmlns:a14="http://schemas.microsoft.com/office/drawing/2010/main" w="9525">
+                <a:solidFill>
+                  <a:schemeClr val="tx1"/>
+                </a:solidFill>
+                <a:miter lim="800000"/>
+                <a:headEnd/>
+                <a:tailEnd/>
+              </a14:hiddenLine>
+            </a:ext>
+            <a:ext uri="{AF507438-7753-43E0-B8FC-AC1667EBCBE1}">
+              <a14:hiddenEffects xmlns:a14="http://schemas.microsoft.com/office/drawing/2010/main">
+                <a:effectLst>
+                  <a:outerShdw dist="35921" dir="2700000" algn="ctr" rotWithShape="0">
+                    <a:schemeClr val="bg2"/>
+                  </a:outerShdw>
+                </a:effectLst>
+              </a14:hiddenEffects>
+            </a:ext>
+          </a:extLst>
+        </p:spPr>
+      </p:pic>
+    </p:spTree>
+    <p:extLst>
+      <p:ext uri="{BB962C8B-B14F-4D97-AF65-F5344CB8AC3E}">
+        <p14:creationId xmlns:p14="http://schemas.microsoft.com/office/powerpoint/2010/main" val="1496352989"/>
+      </p:ext>
+    </p:extLst>
+  </p:cSld>
+  <p:clrMapOvr>
+    <a:masterClrMapping/>
+  </p:clrMapOvr>
+</p:sld>
+</file>
+
+<file path=ppt/slides/slide9.xml><?xml version="1.0" encoding="utf-8"?>
 <p:sld xmlns:a="http://schemas.openxmlformats.org/drawingml/2006/main" xmlns:r="http://schemas.openxmlformats.org/officeDocument/2006/relationships" xmlns:p="http://schemas.openxmlformats.org/presentationml/2006/main">
   <p:cSld>
     <p:spTree>

--- a/Платформер.pptx
+++ b/Платформер.pptx
@@ -112,6 +112,22 @@
       </a:defRPr>
     </a:lvl9pPr>
   </p:defaultTextStyle>
+  <p:extLst>
+    <p:ext uri="{EFAFB233-063F-42B5-8137-9DF3F51BA10A}">
+      <p15:sldGuideLst xmlns:p15="http://schemas.microsoft.com/office/powerpoint/2012/main">
+        <p15:guide id="1" orient="horz" pos="2160">
+          <p15:clr>
+            <a:srgbClr val="A4A3A4"/>
+          </p15:clr>
+        </p15:guide>
+        <p15:guide id="2" pos="2880">
+          <p15:clr>
+            <a:srgbClr val="A4A3A4"/>
+          </p15:clr>
+        </p15:guide>
+      </p15:sldGuideLst>
+    </p:ext>
+  </p:extLst>
 </p:presentation>
 </file>
 
@@ -296,7 +312,7 @@
           <a:p>
             <a:fld id="{771EA96F-B606-4F69-9F2C-3E7F3E736C89}" type="datetimeFigureOut">
               <a:rPr lang="ru-RU" smtClean="0"/>
-              <a:t>27.01.2022</a:t>
+              <a:t>28.01.2022</a:t>
             </a:fld>
             <a:endParaRPr lang="ru-RU"/>
           </a:p>
@@ -466,7 +482,7 @@
           <a:p>
             <a:fld id="{771EA96F-B606-4F69-9F2C-3E7F3E736C89}" type="datetimeFigureOut">
               <a:rPr lang="ru-RU" smtClean="0"/>
-              <a:t>27.01.2022</a:t>
+              <a:t>28.01.2022</a:t>
             </a:fld>
             <a:endParaRPr lang="ru-RU"/>
           </a:p>
@@ -646,7 +662,7 @@
           <a:p>
             <a:fld id="{771EA96F-B606-4F69-9F2C-3E7F3E736C89}" type="datetimeFigureOut">
               <a:rPr lang="ru-RU" smtClean="0"/>
-              <a:t>27.01.2022</a:t>
+              <a:t>28.01.2022</a:t>
             </a:fld>
             <a:endParaRPr lang="ru-RU"/>
           </a:p>
@@ -816,7 +832,7 @@
           <a:p>
             <a:fld id="{771EA96F-B606-4F69-9F2C-3E7F3E736C89}" type="datetimeFigureOut">
               <a:rPr lang="ru-RU" smtClean="0"/>
-              <a:t>27.01.2022</a:t>
+              <a:t>28.01.2022</a:t>
             </a:fld>
             <a:endParaRPr lang="ru-RU"/>
           </a:p>
@@ -1062,7 +1078,7 @@
           <a:p>
             <a:fld id="{771EA96F-B606-4F69-9F2C-3E7F3E736C89}" type="datetimeFigureOut">
               <a:rPr lang="ru-RU" smtClean="0"/>
-              <a:t>27.01.2022</a:t>
+              <a:t>28.01.2022</a:t>
             </a:fld>
             <a:endParaRPr lang="ru-RU"/>
           </a:p>
@@ -1350,7 +1366,7 @@
           <a:p>
             <a:fld id="{771EA96F-B606-4F69-9F2C-3E7F3E736C89}" type="datetimeFigureOut">
               <a:rPr lang="ru-RU" smtClean="0"/>
-              <a:t>27.01.2022</a:t>
+              <a:t>28.01.2022</a:t>
             </a:fld>
             <a:endParaRPr lang="ru-RU"/>
           </a:p>
@@ -1772,7 +1788,7 @@
           <a:p>
             <a:fld id="{771EA96F-B606-4F69-9F2C-3E7F3E736C89}" type="datetimeFigureOut">
               <a:rPr lang="ru-RU" smtClean="0"/>
-              <a:t>27.01.2022</a:t>
+              <a:t>28.01.2022</a:t>
             </a:fld>
             <a:endParaRPr lang="ru-RU"/>
           </a:p>
@@ -1890,7 +1906,7 @@
           <a:p>
             <a:fld id="{771EA96F-B606-4F69-9F2C-3E7F3E736C89}" type="datetimeFigureOut">
               <a:rPr lang="ru-RU" smtClean="0"/>
-              <a:t>27.01.2022</a:t>
+              <a:t>28.01.2022</a:t>
             </a:fld>
             <a:endParaRPr lang="ru-RU"/>
           </a:p>
@@ -1985,7 +2001,7 @@
           <a:p>
             <a:fld id="{771EA96F-B606-4F69-9F2C-3E7F3E736C89}" type="datetimeFigureOut">
               <a:rPr lang="ru-RU" smtClean="0"/>
-              <a:t>27.01.2022</a:t>
+              <a:t>28.01.2022</a:t>
             </a:fld>
             <a:endParaRPr lang="ru-RU"/>
           </a:p>
@@ -2262,7 +2278,7 @@
           <a:p>
             <a:fld id="{771EA96F-B606-4F69-9F2C-3E7F3E736C89}" type="datetimeFigureOut">
               <a:rPr lang="ru-RU" smtClean="0"/>
-              <a:t>27.01.2022</a:t>
+              <a:t>28.01.2022</a:t>
             </a:fld>
             <a:endParaRPr lang="ru-RU"/>
           </a:p>
@@ -2515,7 +2531,7 @@
           <a:p>
             <a:fld id="{771EA96F-B606-4F69-9F2C-3E7F3E736C89}" type="datetimeFigureOut">
               <a:rPr lang="ru-RU" smtClean="0"/>
-              <a:t>27.01.2022</a:t>
+              <a:t>28.01.2022</a:t>
             </a:fld>
             <a:endParaRPr lang="ru-RU"/>
           </a:p>
@@ -2728,7 +2744,7 @@
           <a:p>
             <a:fld id="{771EA96F-B606-4F69-9F2C-3E7F3E736C89}" type="datetimeFigureOut">
               <a:rPr lang="ru-RU" smtClean="0"/>
-              <a:t>27.01.2022</a:t>
+              <a:t>28.01.2022</a:t>
             </a:fld>
             <a:endParaRPr lang="ru-RU"/>
           </a:p>
@@ -3202,6 +3218,13 @@
   <p:clrMapOvr>
     <a:masterClrMapping/>
   </p:clrMapOvr>
+  <p:timing>
+    <p:tnLst>
+      <p:par>
+        <p:cTn id="1" dur="indefinite" restart="never" nodeType="tmRoot"/>
+      </p:par>
+    </p:tnLst>
+  </p:timing>
 </p:sld>
 </file>
 
@@ -3594,6 +3617,13 @@
   <p:clrMapOvr>
     <a:masterClrMapping/>
   </p:clrMapOvr>
+  <p:timing>
+    <p:tnLst>
+      <p:par>
+        <p:cTn id="1" dur="indefinite" restart="never" nodeType="tmRoot"/>
+      </p:par>
+    </p:tnLst>
+  </p:timing>
 </p:sld>
 </file>
 
@@ -3780,6 +3810,13 @@
   <p:clrMapOvr>
     <a:masterClrMapping/>
   </p:clrMapOvr>
+  <p:timing>
+    <p:tnLst>
+      <p:par>
+        <p:cTn id="1" dur="indefinite" restart="never" nodeType="tmRoot"/>
+      </p:par>
+    </p:tnLst>
+  </p:timing>
 </p:sld>
 </file>
 
@@ -3904,6 +3941,13 @@
   <p:clrMapOvr>
     <a:masterClrMapping/>
   </p:clrMapOvr>
+  <p:timing>
+    <p:tnLst>
+      <p:par>
+        <p:cTn id="1" dur="indefinite" restart="never" nodeType="tmRoot"/>
+      </p:par>
+    </p:tnLst>
+  </p:timing>
 </p:sld>
 </file>
 
@@ -4026,6 +4070,13 @@
   <p:clrMapOvr>
     <a:masterClrMapping/>
   </p:clrMapOvr>
+  <p:timing>
+    <p:tnLst>
+      <p:par>
+        <p:cTn id="1" dur="indefinite" restart="never" nodeType="tmRoot"/>
+      </p:par>
+    </p:tnLst>
+  </p:timing>
 </p:sld>
 </file>
 
@@ -4152,6 +4203,13 @@
   <p:clrMapOvr>
     <a:masterClrMapping/>
   </p:clrMapOvr>
+  <p:timing>
+    <p:tnLst>
+      <p:par>
+        <p:cTn id="1" dur="indefinite" restart="never" nodeType="tmRoot"/>
+      </p:par>
+    </p:tnLst>
+  </p:timing>
 </p:sld>
 </file>
 
@@ -4276,6 +4334,13 @@
   <p:clrMapOvr>
     <a:masterClrMapping/>
   </p:clrMapOvr>
+  <p:timing>
+    <p:tnLst>
+      <p:par>
+        <p:cTn id="1" dur="indefinite" restart="never" nodeType="tmRoot"/>
+      </p:par>
+    </p:tnLst>
+  </p:timing>
 </p:sld>
 </file>
 
@@ -4398,6 +4463,13 @@
   <p:clrMapOvr>
     <a:masterClrMapping/>
   </p:clrMapOvr>
+  <p:timing>
+    <p:tnLst>
+      <p:par>
+        <p:cTn id="1" dur="indefinite" restart="never" nodeType="tmRoot"/>
+      </p:par>
+    </p:tnLst>
+  </p:timing>
 </p:sld>
 </file>
 
@@ -4458,7 +4530,19 @@
             </a:pPr>
             <a:r>
               <a:rPr lang="ru-RU" dirty="0" smtClean="0"/>
-              <a:t>Так же можно было бы добавить больше разновидностей врагов, построить больше уровней и в целом сделать игру более интересной.</a:t>
+              <a:t>Так же можно было бы добавить больше </a:t>
+            </a:r>
+            <a:r>
+              <a:rPr lang="ru-RU" smtClean="0"/>
+              <a:t>разновидностей </a:t>
+            </a:r>
+            <a:r>
+              <a:rPr lang="ru-RU" smtClean="0"/>
+              <a:t>препятствий, </a:t>
+            </a:r>
+            <a:r>
+              <a:rPr lang="ru-RU" dirty="0" smtClean="0"/>
+              <a:t>построить больше уровней и в целом сделать игру более интересной.</a:t>
             </a:r>
           </a:p>
           <a:p>
@@ -4665,6 +4749,13 @@
   <p:clrMapOvr>
     <a:masterClrMapping/>
   </p:clrMapOvr>
+  <p:timing>
+    <p:tnLst>
+      <p:par>
+        <p:cTn id="1" dur="indefinite" restart="never" nodeType="tmRoot"/>
+      </p:par>
+    </p:tnLst>
+  </p:timing>
 </p:sld>
 </file>
 
